--- a/presentation/Lumen-pitch.pptx
+++ b/presentation/Lumen-pitch.pptx
@@ -1846,7 +1846,7 @@
                 <a:ea typeface="Calibri" pitchFamily="34" charset="-122"/>
                 <a:cs typeface="Calibri" pitchFamily="34" charset="-120"/>
               </a:rPr>
-              <a:t>Enpal track   ·   iOS app + TypeScript MCP backend   ·   voice in, voice out</a:t>
+              <a:t>Enpal track   ·   iOS app + TypeScript backend   ·   voice in, voice out</a:t>
             </a:r>
             <a:endParaRPr lang="en-US" sz="1300" dirty="0"/>
           </a:p>
